--- a/vta/slides/Module_3_Indications_for_Ventilatory_Support.pptx
+++ b/vta/slides/Module_3_Indications_for_Ventilatory_Support.pptx
@@ -1970,7 +1970,7 @@
                 <a:ea typeface="Calibri" pitchFamily="34" charset="-122"/>
                 <a:cs typeface="Calibri" pitchFamily="34" charset="-120"/>
               </a:rPr>
-              <a:t>Day 1 · Foundations</a:t>
+              <a:t>Foundations</a:t>
             </a:r>
             <a:pPr indent="0" marL="0">
               <a:buNone/>
@@ -1984,7 +1984,7 @@
                 <a:ea typeface="Calibri" pitchFamily="34" charset="-122"/>
                 <a:cs typeface="Calibri" pitchFamily="34" charset="-120"/>
               </a:rPr>
-              <a:t>   ·   ~40 min   ·   6 lessons</a:t>
+              <a:t>   ·   6 lessons</a:t>
             </a:r>
             <a:endParaRPr lang="en-US" sz="1300" dirty="0"/>
           </a:p>
@@ -3490,7 +3490,7 @@
         <p:spPr>
           <a:xfrm>
             <a:off x="548640" y="2148840"/>
-            <a:ext cx="6309360" cy="4114800"/>
+            <a:ext cx="6309360" cy="4160520"/>
           </a:xfrm>
           <a:prstGeom prst="rect">
             <a:avLst/>
@@ -3507,7 +3507,7 @@
                 <a:spcPct val="100000"/>
               </a:lnSpc>
               <a:spcAft>
-                <a:spcPts val="900"/>
+                <a:spcPts val="1000"/>
               </a:spcAft>
               <a:buSzPct val="100000"/>
               <a:buChar char="•"/>
@@ -3531,7 +3531,7 @@
                 <a:spcPct val="100000"/>
               </a:lnSpc>
               <a:spcAft>
-                <a:spcPts val="900"/>
+                <a:spcPts val="1000"/>
               </a:spcAft>
               <a:buSzPct val="100000"/>
               <a:buChar char="•"/>
@@ -3545,7 +3545,7 @@
                 <a:ea typeface="Calibri" pitchFamily="34" charset="-122"/>
                 <a:cs typeface="Calibri" pitchFamily="34" charset="-120"/>
               </a:rPr>
-              <a:t>For acute pulmonary edema, the foundational evidence is Bersten et al.</a:t>
+              <a:t>For acute pulmonary edema, the foundational evidence is Bersten et al. (NEJM 1991): 39 patients randomized to CPAP vs standard oxygen. Intubation rate dropped from 35% to 0% in the CPAP arm.</a:t>
             </a:r>
             <a:endParaRPr lang="en-US" sz="1550" dirty="0"/>
           </a:p>
@@ -3555,7 +3555,7 @@
                 <a:spcPct val="100000"/>
               </a:lnSpc>
               <a:spcAft>
-                <a:spcPts val="900"/>
+                <a:spcPts val="1000"/>
               </a:spcAft>
               <a:buSzPct val="100000"/>
               <a:buChar char="•"/>
@@ -3569,7 +3569,7 @@
                 <a:ea typeface="Calibri" pitchFamily="34" charset="-122"/>
                 <a:cs typeface="Calibri" pitchFamily="34" charset="-120"/>
               </a:rPr>
-              <a:t>For COPD exacerbation with hypercapnia, Brochard et al.</a:t>
+              <a:t>For COPD exacerbation with hypercapnia, Brochard et al. (NEJM 1995) randomized 85 patients to BiPAP vs standard care. Intubation: 26% vs 74%. Mortality: 9% vs 29%.</a:t>
             </a:r>
             <a:endParaRPr lang="en-US" sz="1550" dirty="0"/>
           </a:p>
@@ -3878,7 +3878,7 @@
         <p:spPr>
           <a:xfrm>
             <a:off x="548640" y="2148840"/>
-            <a:ext cx="10058400" cy="4114800"/>
+            <a:ext cx="10058400" cy="4160520"/>
           </a:xfrm>
           <a:prstGeom prst="rect">
             <a:avLst/>
@@ -3895,7 +3895,7 @@
                 <a:spcPct val="100000"/>
               </a:lnSpc>
               <a:spcAft>
-                <a:spcPts val="900"/>
+                <a:spcPts val="1000"/>
               </a:spcAft>
               <a:buSzPct val="100000"/>
               <a:buChar char="•"/>
@@ -3909,7 +3909,7 @@
                 <a:ea typeface="Calibri" pitchFamily="34" charset="-122"/>
                 <a:cs typeface="Calibri" pitchFamily="34" charset="-120"/>
               </a:rPr>
-              <a:t>Continuous Positive Airway Pressure (CPAP) is one steady pressure the whole cycle long — a doorstop wedged under the airway, holding it open the same…</a:t>
+              <a:t>Continuous Positive Airway Pressure (CPAP) is one steady pressure the whole cycle long — a doorstop wedged under the airway, holding it open the same amount whether the patient breathes in or out.</a:t>
             </a:r>
             <a:endParaRPr lang="en-US" sz="1550" dirty="0"/>
           </a:p>
@@ -3919,7 +3919,7 @@
                 <a:spcPct val="100000"/>
               </a:lnSpc>
               <a:spcAft>
-                <a:spcPts val="900"/>
+                <a:spcPts val="1000"/>
               </a:spcAft>
               <a:buSzPct val="100000"/>
               <a:buChar char="•"/>
@@ -3933,7 +3933,7 @@
                 <a:ea typeface="Calibri" pitchFamily="34" charset="-122"/>
                 <a:cs typeface="Calibri" pitchFamily="34" charset="-120"/>
               </a:rPr>
-              <a:t>Bilevel Positive Airway Pressure (BiPAP) adds a second, higher pressure on inspiration — like a spotter at the bench press who shoves the bar up each time…</a:t>
+              <a:t>Bilevel Positive Airway Pressure (BiPAP) adds a second, higher pressure on inspiration — like a spotter at the bench press who shoves the bar up each time you push and eases off as you lower it.</a:t>
             </a:r>
             <a:endParaRPr lang="en-US" sz="1550" dirty="0"/>
           </a:p>
@@ -3943,7 +3943,7 @@
                 <a:spcPct val="100000"/>
               </a:lnSpc>
               <a:spcAft>
-                <a:spcPts val="900"/>
+                <a:spcPts val="1000"/>
               </a:spcAft>
               <a:buSzPct val="100000"/>
               <a:buChar char="•"/>
@@ -3957,7 +3957,7 @@
                 <a:ea typeface="Calibri" pitchFamily="34" charset="-122"/>
                 <a:cs typeface="Calibri" pitchFamily="34" charset="-120"/>
               </a:rPr>
-              <a:t>Typical starting settings: CPAP at 5 to 10 cmH₂O with FiO₂ 100% initially, weaned.</a:t>
+              <a:t>Typical starting settings: CPAP at 5 to 10 cmH₂O with FiO₂ 100% initially, weaned. BiPAP at IPAP 10 / EPAP 5, FiO₂ titrated. Both require a good mask seal. Sit the patient up.</a:t>
             </a:r>
             <a:endParaRPr lang="en-US" sz="1550" dirty="0"/>
           </a:p>
@@ -4121,7 +4121,7 @@
         <p:spPr>
           <a:xfrm>
             <a:off x="548640" y="2148840"/>
-            <a:ext cx="6309360" cy="4114800"/>
+            <a:ext cx="6309360" cy="4160520"/>
           </a:xfrm>
           <a:prstGeom prst="rect">
             <a:avLst/>
@@ -4138,7 +4138,7 @@
                 <a:spcPct val="100000"/>
               </a:lnSpc>
               <a:spcAft>
-                <a:spcPts val="900"/>
+                <a:spcPts val="1000"/>
               </a:spcAft>
               <a:buSzPct val="100000"/>
               <a:buChar char="•"/>
@@ -4152,7 +4152,7 @@
                 <a:ea typeface="Calibri" pitchFamily="34" charset="-122"/>
                 <a:cs typeface="Calibri" pitchFamily="34" charset="-120"/>
               </a:rPr>
-              <a:t>NIV that is going to work shows signs of working within minutes.</a:t>
+              <a:t>NIV that is going to work shows signs of working within minutes. Improvement: falling respiratory rate, rising saturation, lengthening of speech, softening accessory muscle use, normalizing EtCO₂ trend.</a:t>
             </a:r>
             <a:endParaRPr lang="en-US" sz="1550" dirty="0"/>
           </a:p>
@@ -4162,7 +4162,7 @@
                 <a:spcPct val="100000"/>
               </a:lnSpc>
               <a:spcAft>
-                <a:spcPts val="900"/>
+                <a:spcPts val="1000"/>
               </a:spcAft>
               <a:buSzPct val="100000"/>
               <a:buChar char="•"/>
@@ -4176,7 +4176,7 @@
                 <a:ea typeface="Calibri" pitchFamily="34" charset="-122"/>
                 <a:cs typeface="Calibri" pitchFamily="34" charset="-120"/>
               </a:rPr>
-              <a:t>NIV that is not going to work also declares itself early.</a:t>
+              <a:t>NIV that is not going to work also declares itself early. Persistent or rising RR, no change in saturation, declining mental status, vomiting, inability to tolerate the mask are all signs of failure.</a:t>
             </a:r>
             <a:endParaRPr lang="en-US" sz="1550" dirty="0"/>
           </a:p>
@@ -4186,7 +4186,7 @@
                 <a:spcPct val="100000"/>
               </a:lnSpc>
               <a:spcAft>
-                <a:spcPts val="900"/>
+                <a:spcPts val="1000"/>
               </a:spcAft>
               <a:buSzPct val="100000"/>
               <a:buChar char="•"/>
@@ -4200,7 +4200,7 @@
                 <a:ea typeface="Calibri" pitchFamily="34" charset="-122"/>
                 <a:cs typeface="Calibri" pitchFamily="34" charset="-120"/>
               </a:rPr>
-              <a:t>Apply the 1-hour rule.</a:t>
+              <a:t>Apply the 1-hour rule. If the patient has been on NIV for 60 minutes without clear improvement, escalate to invasive ventilation.</a:t>
             </a:r>
             <a:endParaRPr lang="en-US" sz="1550" dirty="0"/>
           </a:p>
@@ -4509,7 +4509,7 @@
         <p:spPr>
           <a:xfrm>
             <a:off x="548640" y="2148840"/>
-            <a:ext cx="6309360" cy="4114800"/>
+            <a:ext cx="6309360" cy="4160520"/>
           </a:xfrm>
           <a:prstGeom prst="rect">
             <a:avLst/>
@@ -4526,13 +4526,13 @@
                 <a:spcPct val="100000"/>
               </a:lnSpc>
               <a:spcAft>
-                <a:spcPts val="900"/>
+                <a:spcPts val="800"/>
               </a:spcAft>
               <a:buSzPct val="100000"/>
               <a:buChar char="•"/>
             </a:pPr>
             <a:r>
-              <a:rPr lang="en-US" sz="1550" dirty="0">
+              <a:rPr lang="en-US" sz="1450" dirty="0">
                 <a:solidFill>
                   <a:srgbClr val="1B2433"/>
                 </a:solidFill>
@@ -4542,7 +4542,7 @@
               </a:rPr>
               <a:t>ABSOLUTE contraindications must be respected.</a:t>
             </a:r>
-            <a:endParaRPr lang="en-US" sz="1550" dirty="0"/>
+            <a:endParaRPr lang="en-US" sz="1450" dirty="0"/>
           </a:p>
           <a:p>
             <a:pPr marL="177800" indent="-177800">
@@ -4550,13 +4550,13 @@
                 <a:spcPct val="100000"/>
               </a:lnSpc>
               <a:spcAft>
-                <a:spcPts val="900"/>
+                <a:spcPts val="800"/>
               </a:spcAft>
               <a:buSzPct val="100000"/>
               <a:buChar char="•"/>
             </a:pPr>
             <a:r>
-              <a:rPr lang="en-US" sz="1550" dirty="0">
+              <a:rPr lang="en-US" sz="1450" dirty="0">
                 <a:solidFill>
                   <a:srgbClr val="1B2433"/>
                 </a:solidFill>
@@ -4564,9 +4564,9 @@
                 <a:ea typeface="Calibri" pitchFamily="34" charset="-122"/>
                 <a:cs typeface="Calibri" pitchFamily="34" charset="-120"/>
               </a:rPr>
-              <a:t>1.</a:t>
-            </a:r>
-            <a:endParaRPr lang="en-US" sz="1550" dirty="0"/>
+              <a:t>Inability to protect the airway — GCS ≤ 8, no gag, active vomiting, copious secretions. NIV in such a patient is a comfortable way to deliver gastric contents into the lung.</a:t>
+            </a:r>
+            <a:endParaRPr lang="en-US" sz="1450" dirty="0"/>
           </a:p>
           <a:p>
             <a:pPr marL="177800" indent="-177800">
@@ -4574,13 +4574,13 @@
                 <a:spcPct val="100000"/>
               </a:lnSpc>
               <a:spcAft>
-                <a:spcPts val="900"/>
+                <a:spcPts val="800"/>
               </a:spcAft>
               <a:buSzPct val="100000"/>
               <a:buChar char="•"/>
             </a:pPr>
             <a:r>
-              <a:rPr lang="en-US" sz="1550" dirty="0">
+              <a:rPr lang="en-US" sz="1450" dirty="0">
                 <a:solidFill>
                   <a:srgbClr val="1B2433"/>
                 </a:solidFill>
@@ -4588,9 +4588,9 @@
                 <a:ea typeface="Calibri" pitchFamily="34" charset="-122"/>
                 <a:cs typeface="Calibri" pitchFamily="34" charset="-120"/>
               </a:rPr>
-              <a:t>2.</a:t>
-            </a:r>
-            <a:endParaRPr lang="en-US" sz="1550" dirty="0"/>
+              <a:t>Facial trauma or severe deformity preventing mask seal.</a:t>
+            </a:r>
+            <a:endParaRPr lang="en-US" sz="1450" dirty="0"/>
           </a:p>
           <a:p>
             <a:pPr marL="177800" indent="-177800">
@@ -4598,13 +4598,13 @@
                 <a:spcPct val="100000"/>
               </a:lnSpc>
               <a:spcAft>
-                <a:spcPts val="900"/>
+                <a:spcPts val="800"/>
               </a:spcAft>
               <a:buSzPct val="100000"/>
               <a:buChar char="•"/>
             </a:pPr>
             <a:r>
-              <a:rPr lang="en-US" sz="1550" dirty="0">
+              <a:rPr lang="en-US" sz="1450" dirty="0">
                 <a:solidFill>
                   <a:srgbClr val="1B2433"/>
                 </a:solidFill>
@@ -4612,9 +4612,9 @@
                 <a:ea typeface="Calibri" pitchFamily="34" charset="-122"/>
                 <a:cs typeface="Calibri" pitchFamily="34" charset="-120"/>
               </a:rPr>
-              <a:t>3.</a:t>
-            </a:r>
-            <a:endParaRPr lang="en-US" sz="1550" dirty="0"/>
+              <a:t>Hemodynamic instability or peri-arrest state. The time required to set up NIV is wasted on a patient who needs definitive airway control.</a:t>
+            </a:r>
+            <a:endParaRPr lang="en-US" sz="1450" dirty="0"/>
           </a:p>
           <a:p>
             <a:pPr marL="177800" indent="-177800">
@@ -4622,13 +4622,13 @@
                 <a:spcPct val="100000"/>
               </a:lnSpc>
               <a:spcAft>
-                <a:spcPts val="900"/>
+                <a:spcPts val="800"/>
               </a:spcAft>
               <a:buSzPct val="100000"/>
               <a:buChar char="•"/>
             </a:pPr>
             <a:r>
-              <a:rPr lang="en-US" sz="1550" dirty="0">
+              <a:rPr lang="en-US" sz="1450" dirty="0">
                 <a:solidFill>
                   <a:srgbClr val="1B2433"/>
                 </a:solidFill>
@@ -4636,9 +4636,9 @@
                 <a:ea typeface="Calibri" pitchFamily="34" charset="-122"/>
                 <a:cs typeface="Calibri" pitchFamily="34" charset="-120"/>
               </a:rPr>
-              <a:t>4.</a:t>
-            </a:r>
-            <a:endParaRPr lang="en-US" sz="1550" dirty="0"/>
+              <a:t>Pneumothorax (until decompressed). Positive pressure can tension a small PTX into a fatal one.</a:t>
+            </a:r>
+            <a:endParaRPr lang="en-US" sz="1450" dirty="0"/>
           </a:p>
         </p:txBody>
       </p:sp>
@@ -4945,7 +4945,7 @@
         <p:spPr>
           <a:xfrm>
             <a:off x="548640" y="2148840"/>
-            <a:ext cx="10058400" cy="4114800"/>
+            <a:ext cx="10058400" cy="4160520"/>
           </a:xfrm>
           <a:prstGeom prst="rect">
             <a:avLst/>
@@ -4962,13 +4962,13 @@
                 <a:spcPct val="100000"/>
               </a:lnSpc>
               <a:spcAft>
-                <a:spcPts val="900"/>
+                <a:spcPts val="600"/>
               </a:spcAft>
               <a:buSzPct val="100000"/>
               <a:buChar char="•"/>
             </a:pPr>
             <a:r>
-              <a:rPr lang="en-US" sz="1550" dirty="0">
+              <a:rPr lang="en-US" sz="1350" dirty="0">
                 <a:solidFill>
                   <a:srgbClr val="1B2433"/>
                 </a:solidFill>
@@ -4978,7 +4978,7 @@
               </a:rPr>
               <a:t>Move to invasive mechanical ventilation when:</a:t>
             </a:r>
-            <a:endParaRPr lang="en-US" sz="1550" dirty="0"/>
+            <a:endParaRPr lang="en-US" sz="1350" dirty="0"/>
           </a:p>
           <a:p>
             <a:pPr marL="177800" indent="-177800">
@@ -4986,13 +4986,13 @@
                 <a:spcPct val="100000"/>
               </a:lnSpc>
               <a:spcAft>
-                <a:spcPts val="900"/>
+                <a:spcPts val="600"/>
               </a:spcAft>
               <a:buSzPct val="100000"/>
               <a:buChar char="•"/>
             </a:pPr>
             <a:r>
-              <a:rPr lang="en-US" sz="1550" dirty="0">
+              <a:rPr lang="en-US" sz="1350" dirty="0">
                 <a:solidFill>
                   <a:srgbClr val="1B2433"/>
                 </a:solidFill>
@@ -5000,9 +5000,9 @@
                 <a:ea typeface="Calibri" pitchFamily="34" charset="-122"/>
                 <a:cs typeface="Calibri" pitchFamily="34" charset="-120"/>
               </a:rPr>
-              <a:t>1.</a:t>
-            </a:r>
-            <a:endParaRPr lang="en-US" sz="1550" dirty="0"/>
+              <a:t>NIV is failing after a fair trial (typically 30 to 60 minutes; maximum 2 hours).</a:t>
+            </a:r>
+            <a:endParaRPr lang="en-US" sz="1350" dirty="0"/>
           </a:p>
           <a:p>
             <a:pPr marL="177800" indent="-177800">
@@ -5010,13 +5010,13 @@
                 <a:spcPct val="100000"/>
               </a:lnSpc>
               <a:spcAft>
-                <a:spcPts val="900"/>
+                <a:spcPts val="600"/>
               </a:spcAft>
               <a:buSzPct val="100000"/>
               <a:buChar char="•"/>
             </a:pPr>
             <a:r>
-              <a:rPr lang="en-US" sz="1550" dirty="0">
+              <a:rPr lang="en-US" sz="1350" dirty="0">
                 <a:solidFill>
                   <a:srgbClr val="1B2433"/>
                 </a:solidFill>
@@ -5024,9 +5024,9 @@
                 <a:ea typeface="Calibri" pitchFamily="34" charset="-122"/>
                 <a:cs typeface="Calibri" pitchFamily="34" charset="-120"/>
               </a:rPr>
-              <a:t>2.</a:t>
-            </a:r>
-            <a:endParaRPr lang="en-US" sz="1550" dirty="0"/>
+              <a:t>GCS ≤ 8 or unable to protect airway.</a:t>
+            </a:r>
+            <a:endParaRPr lang="en-US" sz="1350" dirty="0"/>
           </a:p>
           <a:p>
             <a:pPr marL="177800" indent="-177800">
@@ -5034,13 +5034,13 @@
                 <a:spcPct val="100000"/>
               </a:lnSpc>
               <a:spcAft>
-                <a:spcPts val="900"/>
+                <a:spcPts val="600"/>
               </a:spcAft>
               <a:buSzPct val="100000"/>
               <a:buChar char="•"/>
             </a:pPr>
             <a:r>
-              <a:rPr lang="en-US" sz="1550" dirty="0">
+              <a:rPr lang="en-US" sz="1350" dirty="0">
                 <a:solidFill>
                   <a:srgbClr val="1B2433"/>
                 </a:solidFill>
@@ -5048,9 +5048,9 @@
                 <a:ea typeface="Calibri" pitchFamily="34" charset="-122"/>
                 <a:cs typeface="Calibri" pitchFamily="34" charset="-120"/>
               </a:rPr>
-              <a:t>3.</a:t>
-            </a:r>
-            <a:endParaRPr lang="en-US" sz="1550" dirty="0"/>
+              <a:t>Apnea or agonal respirations.</a:t>
+            </a:r>
+            <a:endParaRPr lang="en-US" sz="1350" dirty="0"/>
           </a:p>
           <a:p>
             <a:pPr marL="177800" indent="-177800">
@@ -5058,13 +5058,13 @@
                 <a:spcPct val="100000"/>
               </a:lnSpc>
               <a:spcAft>
-                <a:spcPts val="900"/>
+                <a:spcPts val="600"/>
               </a:spcAft>
               <a:buSzPct val="100000"/>
               <a:buChar char="•"/>
             </a:pPr>
             <a:r>
-              <a:rPr lang="en-US" sz="1550" dirty="0">
+              <a:rPr lang="en-US" sz="1350" dirty="0">
                 <a:solidFill>
                   <a:srgbClr val="1B2433"/>
                 </a:solidFill>
@@ -5072,9 +5072,33 @@
                 <a:ea typeface="Calibri" pitchFamily="34" charset="-122"/>
                 <a:cs typeface="Calibri" pitchFamily="34" charset="-120"/>
               </a:rPr>
-              <a:t>4.</a:t>
-            </a:r>
-            <a:endParaRPr lang="en-US" sz="1550" dirty="0"/>
+              <a:t>Refractory hypoxia despite high-FiO₂ NIV.</a:t>
+            </a:r>
+            <a:endParaRPr lang="en-US" sz="1350" dirty="0"/>
+          </a:p>
+          <a:p>
+            <a:pPr marL="177800" indent="-177800">
+              <a:lnSpc>
+                <a:spcPct val="100000"/>
+              </a:lnSpc>
+              <a:spcAft>
+                <a:spcPts val="600"/>
+              </a:spcAft>
+              <a:buSzPct val="100000"/>
+              <a:buChar char="•"/>
+            </a:pPr>
+            <a:r>
+              <a:rPr lang="en-US" sz="1350" dirty="0">
+                <a:solidFill>
+                  <a:srgbClr val="1B2433"/>
+                </a:solidFill>
+                <a:latin typeface="Calibri" pitchFamily="34" charset="0"/>
+                <a:ea typeface="Calibri" pitchFamily="34" charset="-122"/>
+                <a:cs typeface="Calibri" pitchFamily="34" charset="-120"/>
+              </a:rPr>
+              <a:t>Hemodynamic instability requiring control of work of breathing.</a:t>
+            </a:r>
+            <a:endParaRPr lang="en-US" sz="1350" dirty="0"/>
           </a:p>
         </p:txBody>
       </p:sp>
@@ -5236,7 +5260,7 @@
         <p:spPr>
           <a:xfrm>
             <a:off x="548640" y="2148840"/>
-            <a:ext cx="6309360" cy="4114800"/>
+            <a:ext cx="6309360" cy="4160520"/>
           </a:xfrm>
           <a:prstGeom prst="rect">
             <a:avLst/>
@@ -5253,7 +5277,7 @@
                 <a:spcPct val="100000"/>
               </a:lnSpc>
               <a:spcAft>
-                <a:spcPts val="900"/>
+                <a:spcPts val="1000"/>
               </a:spcAft>
               <a:buSzPct val="100000"/>
               <a:buChar char="•"/>
@@ -5267,7 +5291,7 @@
                 <a:ea typeface="Calibri" pitchFamily="34" charset="-122"/>
                 <a:cs typeface="Calibri" pitchFamily="34" charset="-120"/>
               </a:rPr>
-              <a:t>Pre-oxygenation before RSI is topping off the tank before a free-dive: you flush the nitrogen out of the lung's reservoir — the functional residual…</a:t>
+              <a:t>Pre-oxygenation before RSI is topping off the tank before a free-dive: you flush the nitrogen out of the lung's reservoir — the functional residual capacity (FRC) — and fill it with oxygen, so the patient can…</a:t>
             </a:r>
             <a:endParaRPr lang="en-US" sz="1550" dirty="0"/>
           </a:p>
@@ -5277,7 +5301,7 @@
                 <a:spcPct val="100000"/>
               </a:lnSpc>
               <a:spcAft>
-                <a:spcPts val="900"/>
+                <a:spcPts val="1000"/>
               </a:spcAft>
               <a:buSzPct val="100000"/>
               <a:buChar char="•"/>
@@ -5291,7 +5315,7 @@
                 <a:ea typeface="Calibri" pitchFamily="34" charset="-122"/>
                 <a:cs typeface="Calibri" pitchFamily="34" charset="-120"/>
               </a:rPr>
-              <a:t>Standard technique: 3 minutes of tidal-volume breathing on a tight-sealed NRB at flush rate (15 L/min or higher).</a:t>
+              <a:t>Standard technique: 3 minutes of tidal-volume breathing on a tight-sealed NRB at flush rate (15 L/min or higher). Alternative: 8 vital-capacity breaths.</a:t>
             </a:r>
             <a:endParaRPr lang="en-US" sz="1550" dirty="0"/>
           </a:p>
@@ -5301,7 +5325,7 @@
                 <a:spcPct val="100000"/>
               </a:lnSpc>
               <a:spcAft>
-                <a:spcPts val="900"/>
+                <a:spcPts val="1000"/>
               </a:spcAft>
               <a:buSzPct val="100000"/>
               <a:buChar char="•"/>
@@ -5315,7 +5339,7 @@
                 <a:ea typeface="Calibri" pitchFamily="34" charset="-122"/>
                 <a:cs typeface="Calibri" pitchFamily="34" charset="-120"/>
               </a:rPr>
-              <a:t>Apneic oxygenation extends safe apnea further.</a:t>
+              <a:t>Apneic oxygenation extends safe apnea further. A nasal cannula at 15 L/min applied during the laryngoscopy itself continues to deliver oxygen during the apneic interval.</a:t>
             </a:r>
             <a:endParaRPr lang="en-US" sz="1550" dirty="0"/>
           </a:p>
@@ -5984,7 +6008,9 @@
       </p:sp>
       <p:sp>
         <p:nvSpPr>
-          <p:cNvPr id="14" name="Text 12"/>
+          <p:cNvPr id="14" name="Text 12">
+            <a:hlinkClick r:id="rId1" tooltip="Open this module's simulator mission"/>
+          </p:cNvPr>
           <p:cNvSpPr/>
           <p:nvPr/>
         </p:nvSpPr>
@@ -6007,13 +6033,20 @@
               <a:buNone/>
             </a:pPr>
             <a:r>
-              <a:rPr lang="en-US" sz="1700" b="1" dirty="0">
+              <a:rPr lang="en-US" sz="1700" b="1" u="sng" dirty="0">
                 <a:solidFill>
                   <a:srgbClr val="FFFFFF"/>
                 </a:solidFill>
                 <a:latin typeface="Calibri" pitchFamily="34" charset="0"/>
                 <a:ea typeface="Calibri" pitchFamily="34" charset="-122"/>
                 <a:cs typeface="Calibri" pitchFamily="34" charset="-120"/>
+                <a:hlinkClick r:id="rId1" invalidUrl="" action="" tgtFrame="" tooltip="Open this module's simulator mission" history="1" highlightClick="0" endSnd="0">
+                  <a:extLst>
+                    <a:ext uri="{A12FA001-AC4F-418D-AE19-62706E023703}">
+                      <ahyp:hlinkClr xmlns:ahyp="http://schemas.microsoft.com/office/drawing/2018/hyperlinkcolor" val="tx"/>
+                    </a:ext>
+                  </a:extLst>
+                </a:hlinkClick>
               </a:rPr>
               <a:t>LTV 1200 Simulator</a:t>
             </a:r>
@@ -6046,13 +6079,20 @@
               <a:buNone/>
             </a:pPr>
             <a:r>
-              <a:rPr lang="en-US" sz="1250" dirty="0">
-                <a:solidFill>
-                  <a:srgbClr val="A9C2E0"/>
-                </a:solidFill>
-                <a:latin typeface="Calibri" pitchFamily="34" charset="0"/>
-                <a:ea typeface="Calibri" pitchFamily="34" charset="-122"/>
-                <a:cs typeface="Calibri" pitchFamily="34" charset="-120"/>
+              <a:rPr lang="en-US" sz="1250" u="sng" dirty="0">
+                <a:solidFill>
+                  <a:srgbClr val="7FB0E6"/>
+                </a:solidFill>
+                <a:latin typeface="Calibri" pitchFamily="34" charset="0"/>
+                <a:ea typeface="Calibri" pitchFamily="34" charset="-122"/>
+                <a:cs typeface="Calibri" pitchFamily="34" charset="-120"/>
+                <a:hlinkClick r:id="rId2" invalidUrl="" action="" tgtFrame="" tooltip="" history="1" highlightClick="0" endSnd="0">
+                  <a:extLst>
+                    <a:ext uri="{A12FA001-AC4F-418D-AE19-62706E023703}">
+                      <ahyp:hlinkClr xmlns:ahyp="http://schemas.microsoft.com/office/drawing/2018/hyperlinkcolor" val="tx"/>
+                    </a:ext>
+                  </a:extLst>
+                </a:hlinkClick>
               </a:rPr>
               <a:t>vent-ltv1200.html?scenario=niv-vs-tube  —  Make the indication call on an awake COPD patient — BiPAP trial vs the tube — then set…</a:t>
             </a:r>
